--- a/examples/placeplate-style-demo.pptx
+++ b/examples/placeplate-style-demo.pptx
@@ -7197,7 +7197,7 @@
             <a:r>
               <a:rPr sz="1900" b="0">
                 <a:solidFill>
-                  <a:srgbClr val="F2FBFA"/>
+                  <a:srgbClr val="A9CCC9"/>
                 </a:solidFill>
                 <a:latin typeface="Montserrat"/>
               </a:rPr>
@@ -7327,7 +7327,7 @@
             <a:r>
               <a:rPr sz="1900" b="0">
                 <a:solidFill>
-                  <a:srgbClr val="F2FBFA"/>
+                  <a:srgbClr val="A9CCC9"/>
                 </a:solidFill>
                 <a:latin typeface="Montserrat"/>
               </a:rPr>
@@ -7457,7 +7457,7 @@
             <a:r>
               <a:rPr sz="1900" b="0">
                 <a:solidFill>
-                  <a:srgbClr val="F2FBFA"/>
+                  <a:srgbClr val="A9CCC9"/>
                 </a:solidFill>
                 <a:latin typeface="Montserrat"/>
               </a:rPr>

--- a/examples/placeplate-style-demo.pptx
+++ b/examples/placeplate-style-demo.pptx
@@ -288,7 +288,7 @@
           <a:lstStyle/>
           <a:p>
             <a:pPr>
-              <a:defRPr sz="1100">
+              <a:defRPr sz="1200">
                 <a:solidFill>
                   <a:srgbClr val="A9CCC9"/>
                 </a:solidFill>
@@ -738,6 +738,216 @@
 </p:notes>
 </file>
 
+<file path=ppt/notesSlides/notesSlide10.xml><?xml version="1.0" encoding="utf-8"?>
+<p:notes xmlns:a="http://schemas.openxmlformats.org/drawingml/2006/main" xmlns:p="http://schemas.openxmlformats.org/presentationml/2006/main" xmlns:r="http://schemas.openxmlformats.org/officeDocument/2006/relationships">
+  <p:cSld>
+    <p:spTree>
+      <p:nvGrpSpPr>
+        <p:cNvPr id="1" name=""/>
+        <p:cNvGrpSpPr/>
+        <p:nvPr/>
+      </p:nvGrpSpPr>
+      <p:grpSpPr>
+        <a:xfrm>
+          <a:off x="0" y="0"/>
+          <a:ext cx="0" cy="0"/>
+          <a:chOff x="0" y="0"/>
+          <a:chExt cx="0" cy="0"/>
+        </a:xfrm>
+      </p:grpSpPr>
+      <p:sp>
+        <p:nvSpPr>
+          <p:cNvPr id="2" name="Slide Image Placeholder 1"/>
+          <p:cNvSpPr>
+            <a:spLocks noGrp="1"/>
+          </p:cNvSpPr>
+          <p:nvPr>
+            <p:ph type="sldImg" idx="2"/>
+          </p:nvPr>
+        </p:nvSpPr>
+        <p:spPr/>
+      </p:sp>
+      <p:sp>
+        <p:nvSpPr>
+          <p:cNvPr id="3" name="Notes Placeholder 2"/>
+          <p:cNvSpPr>
+            <a:spLocks noGrp="1"/>
+          </p:cNvSpPr>
+          <p:nvPr>
+            <p:ph type="body" idx="3" sz="quarter"/>
+          </p:nvPr>
+        </p:nvSpPr>
+        <p:spPr/>
+        <p:txBody>
+          <a:bodyPr/>
+          <a:lstStyle/>
+          <a:p>
+            <a:r>
+              <a:t>We win on financing and operations, not panel hardware — name the alternatives respectfully.</a:t>
+            </a:r>
+          </a:p>
+        </p:txBody>
+      </p:sp>
+      <p:sp>
+        <p:nvSpPr>
+          <p:cNvPr id="4" name="Slide Number Placeholder 3"/>
+          <p:cNvSpPr>
+            <a:spLocks noGrp="1"/>
+          </p:cNvSpPr>
+          <p:nvPr>
+            <p:ph type="sldNum" idx="5" sz="quarter"/>
+          </p:nvPr>
+        </p:nvSpPr>
+        <p:spPr/>
+      </p:sp>
+    </p:spTree>
+  </p:cSld>
+  <p:clrMapOvr>
+    <a:masterClrMapping/>
+  </p:clrMapOvr>
+</p:notes>
+</file>
+
+<file path=ppt/notesSlides/notesSlide11.xml><?xml version="1.0" encoding="utf-8"?>
+<p:notes xmlns:a="http://schemas.openxmlformats.org/drawingml/2006/main" xmlns:p="http://schemas.openxmlformats.org/presentationml/2006/main" xmlns:r="http://schemas.openxmlformats.org/officeDocument/2006/relationships">
+  <p:cSld>
+    <p:spTree>
+      <p:nvGrpSpPr>
+        <p:cNvPr id="1" name=""/>
+        <p:cNvGrpSpPr/>
+        <p:nvPr/>
+      </p:nvGrpSpPr>
+      <p:grpSpPr>
+        <a:xfrm>
+          <a:off x="0" y="0"/>
+          <a:ext cx="0" cy="0"/>
+          <a:chOff x="0" y="0"/>
+          <a:chExt cx="0" cy="0"/>
+        </a:xfrm>
+      </p:grpSpPr>
+      <p:sp>
+        <p:nvSpPr>
+          <p:cNvPr id="2" name="Slide Image Placeholder 1"/>
+          <p:cNvSpPr>
+            <a:spLocks noGrp="1"/>
+          </p:cNvSpPr>
+          <p:nvPr>
+            <p:ph type="sldImg" idx="2"/>
+          </p:nvPr>
+        </p:nvSpPr>
+        <p:spPr/>
+      </p:sp>
+      <p:sp>
+        <p:nvSpPr>
+          <p:cNvPr id="3" name="Notes Placeholder 2"/>
+          <p:cNvSpPr>
+            <a:spLocks noGrp="1"/>
+          </p:cNvSpPr>
+          <p:nvPr>
+            <p:ph type="body" idx="3" sz="quarter"/>
+          </p:nvPr>
+        </p:nvSpPr>
+        <p:spPr/>
+        <p:txBody>
+          <a:bodyPr/>
+          <a:lstStyle/>
+          <a:p>
+            <a:r>
+              <a:t>Each bio answers: why can THIS person execute their part? Keep to 20 seconds each.</a:t>
+            </a:r>
+          </a:p>
+        </p:txBody>
+      </p:sp>
+      <p:sp>
+        <p:nvSpPr>
+          <p:cNvPr id="4" name="Slide Number Placeholder 3"/>
+          <p:cNvSpPr>
+            <a:spLocks noGrp="1"/>
+          </p:cNvSpPr>
+          <p:nvPr>
+            <p:ph type="sldNum" idx="5" sz="quarter"/>
+          </p:nvPr>
+        </p:nvSpPr>
+        <p:spPr/>
+      </p:sp>
+    </p:spTree>
+  </p:cSld>
+  <p:clrMapOvr>
+    <a:masterClrMapping/>
+  </p:clrMapOvr>
+</p:notes>
+</file>
+
+<file path=ppt/notesSlides/notesSlide12.xml><?xml version="1.0" encoding="utf-8"?>
+<p:notes xmlns:a="http://schemas.openxmlformats.org/drawingml/2006/main" xmlns:p="http://schemas.openxmlformats.org/presentationml/2006/main" xmlns:r="http://schemas.openxmlformats.org/officeDocument/2006/relationships">
+  <p:cSld>
+    <p:spTree>
+      <p:nvGrpSpPr>
+        <p:cNvPr id="1" name=""/>
+        <p:cNvGrpSpPr/>
+        <p:nvPr/>
+      </p:nvGrpSpPr>
+      <p:grpSpPr>
+        <a:xfrm>
+          <a:off x="0" y="0"/>
+          <a:ext cx="0" cy="0"/>
+          <a:chOff x="0" y="0"/>
+          <a:chExt cx="0" cy="0"/>
+        </a:xfrm>
+      </p:grpSpPr>
+      <p:sp>
+        <p:nvSpPr>
+          <p:cNvPr id="2" name="Slide Image Placeholder 1"/>
+          <p:cNvSpPr>
+            <a:spLocks noGrp="1"/>
+          </p:cNvSpPr>
+          <p:nvPr>
+            <p:ph type="sldImg" idx="2"/>
+          </p:nvPr>
+        </p:nvSpPr>
+        <p:spPr/>
+      </p:sp>
+      <p:sp>
+        <p:nvSpPr>
+          <p:cNvPr id="3" name="Notes Placeholder 2"/>
+          <p:cNvSpPr>
+            <a:spLocks noGrp="1"/>
+          </p:cNvSpPr>
+          <p:nvPr>
+            <p:ph type="body" idx="3" sz="quarter"/>
+          </p:nvPr>
+        </p:nvSpPr>
+        <p:spPr/>
+        <p:txBody>
+          <a:bodyPr/>
+          <a:lstStyle/>
+          <a:p>
+            <a:r>
+              <a:t>State the ask, the use, the milestone. Then stop talking — let them respond.</a:t>
+            </a:r>
+          </a:p>
+        </p:txBody>
+      </p:sp>
+      <p:sp>
+        <p:nvSpPr>
+          <p:cNvPr id="4" name="Slide Number Placeholder 3"/>
+          <p:cNvSpPr>
+            <a:spLocks noGrp="1"/>
+          </p:cNvSpPr>
+          <p:nvPr>
+            <p:ph type="sldNum" idx="5" sz="quarter"/>
+          </p:nvPr>
+        </p:nvSpPr>
+        <p:spPr/>
+      </p:sp>
+    </p:spTree>
+  </p:cSld>
+  <p:clrMapOvr>
+    <a:masterClrMapping/>
+  </p:clrMapOvr>
+</p:notes>
+</file>
+
 <file path=ppt/notesSlides/notesSlide2.xml><?xml version="1.0" encoding="utf-8"?>
 <p:notes xmlns:a="http://schemas.openxmlformats.org/drawingml/2006/main" xmlns:p="http://schemas.openxmlformats.org/presentationml/2006/main" xmlns:r="http://schemas.openxmlformats.org/officeDocument/2006/relationships">
   <p:cSld>
@@ -783,7 +993,497 @@
           <a:lstStyle/>
           <a:p>
             <a:r>
+              <a:t>Promise the arc in 20 seconds: problem, solution, market proof, ask.</a:t>
+            </a:r>
+          </a:p>
+        </p:txBody>
+      </p:sp>
+      <p:sp>
+        <p:nvSpPr>
+          <p:cNvPr id="4" name="Slide Number Placeholder 3"/>
+          <p:cNvSpPr>
+            <a:spLocks noGrp="1"/>
+          </p:cNvSpPr>
+          <p:nvPr>
+            <p:ph type="sldNum" idx="5" sz="quarter"/>
+          </p:nvPr>
+        </p:nvSpPr>
+        <p:spPr/>
+      </p:sp>
+    </p:spTree>
+  </p:cSld>
+  <p:clrMapOvr>
+    <a:masterClrMapping/>
+  </p:clrMapOvr>
+</p:notes>
+</file>
+
+<file path=ppt/notesSlides/notesSlide3.xml><?xml version="1.0" encoding="utf-8"?>
+<p:notes xmlns:a="http://schemas.openxmlformats.org/drawingml/2006/main" xmlns:p="http://schemas.openxmlformats.org/presentationml/2006/main" xmlns:r="http://schemas.openxmlformats.org/officeDocument/2006/relationships">
+  <p:cSld>
+    <p:spTree>
+      <p:nvGrpSpPr>
+        <p:cNvPr id="1" name=""/>
+        <p:cNvGrpSpPr/>
+        <p:nvPr/>
+      </p:nvGrpSpPr>
+      <p:grpSpPr>
+        <a:xfrm>
+          <a:off x="0" y="0"/>
+          <a:ext cx="0" cy="0"/>
+          <a:chOff x="0" y="0"/>
+          <a:chExt cx="0" cy="0"/>
+        </a:xfrm>
+      </p:grpSpPr>
+      <p:sp>
+        <p:nvSpPr>
+          <p:cNvPr id="2" name="Slide Image Placeholder 1"/>
+          <p:cNvSpPr>
+            <a:spLocks noGrp="1"/>
+          </p:cNvSpPr>
+          <p:nvPr>
+            <p:ph type="sldImg" idx="2"/>
+          </p:nvPr>
+        </p:nvSpPr>
+        <p:spPr/>
+      </p:sp>
+      <p:sp>
+        <p:nvSpPr>
+          <p:cNvPr id="3" name="Notes Placeholder 2"/>
+          <p:cNvSpPr>
+            <a:spLocks noGrp="1"/>
+          </p:cNvSpPr>
+          <p:nvPr>
+            <p:ph type="body" idx="3" sz="quarter"/>
+          </p:nvPr>
+        </p:nvSpPr>
+        <p:spPr/>
+        <p:txBody>
+          <a:bodyPr/>
+          <a:lstStyle/>
+          <a:p>
+            <a:r>
+              <a:t>Land the pain with one story: a warehouse owner paying full tariff under empty sun. Pause after the 38% figure.</a:t>
+            </a:r>
+          </a:p>
+        </p:txBody>
+      </p:sp>
+      <p:sp>
+        <p:nvSpPr>
+          <p:cNvPr id="4" name="Slide Number Placeholder 3"/>
+          <p:cNvSpPr>
+            <a:spLocks noGrp="1"/>
+          </p:cNvSpPr>
+          <p:nvPr>
+            <p:ph type="sldNum" idx="5" sz="quarter"/>
+          </p:nvPr>
+        </p:nvSpPr>
+        <p:spPr/>
+      </p:sp>
+    </p:spTree>
+  </p:cSld>
+  <p:clrMapOvr>
+    <a:masterClrMapping/>
+  </p:clrMapOvr>
+</p:notes>
+</file>
+
+<file path=ppt/notesSlides/notesSlide4.xml><?xml version="1.0" encoding="utf-8"?>
+<p:notes xmlns:a="http://schemas.openxmlformats.org/drawingml/2006/main" xmlns:p="http://schemas.openxmlformats.org/presentationml/2006/main" xmlns:r="http://schemas.openxmlformats.org/officeDocument/2006/relationships">
+  <p:cSld>
+    <p:spTree>
+      <p:nvGrpSpPr>
+        <p:cNvPr id="1" name=""/>
+        <p:cNvGrpSpPr/>
+        <p:nvPr/>
+      </p:nvGrpSpPr>
+      <p:grpSpPr>
+        <a:xfrm>
+          <a:off x="0" y="0"/>
+          <a:ext cx="0" cy="0"/>
+          <a:chOff x="0" y="0"/>
+          <a:chExt cx="0" cy="0"/>
+        </a:xfrm>
+      </p:grpSpPr>
+      <p:sp>
+        <p:nvSpPr>
+          <p:cNvPr id="2" name="Slide Image Placeholder 1"/>
+          <p:cNvSpPr>
+            <a:spLocks noGrp="1"/>
+          </p:cNvSpPr>
+          <p:nvPr>
+            <p:ph type="sldImg" idx="2"/>
+          </p:nvPr>
+        </p:nvSpPr>
+        <p:spPr/>
+      </p:sp>
+      <p:sp>
+        <p:nvSpPr>
+          <p:cNvPr id="3" name="Notes Placeholder 2"/>
+          <p:cNvSpPr>
+            <a:spLocks noGrp="1"/>
+          </p:cNvSpPr>
+          <p:nvPr>
+            <p:ph type="body" idx="3" sz="quarter"/>
+          </p:nvPr>
+        </p:nvSpPr>
+        <p:spPr/>
+        <p:txBody>
+          <a:bodyPr/>
+          <a:lstStyle/>
+          <a:p>
+            <a:r>
+              <a:t>Section beat. One sentence: we remove every barrier — money, risk, operations.</a:t>
+            </a:r>
+          </a:p>
+        </p:txBody>
+      </p:sp>
+      <p:sp>
+        <p:nvSpPr>
+          <p:cNvPr id="4" name="Slide Number Placeholder 3"/>
+          <p:cNvSpPr>
+            <a:spLocks noGrp="1"/>
+          </p:cNvSpPr>
+          <p:nvPr>
+            <p:ph type="sldNum" idx="5" sz="quarter"/>
+          </p:nvPr>
+        </p:nvSpPr>
+        <p:spPr/>
+      </p:sp>
+    </p:spTree>
+  </p:cSld>
+  <p:clrMapOvr>
+    <a:masterClrMapping/>
+  </p:clrMapOvr>
+</p:notes>
+</file>
+
+<file path=ppt/notesSlides/notesSlide5.xml><?xml version="1.0" encoding="utf-8"?>
+<p:notes xmlns:a="http://schemas.openxmlformats.org/drawingml/2006/main" xmlns:p="http://schemas.openxmlformats.org/presentationml/2006/main" xmlns:r="http://schemas.openxmlformats.org/officeDocument/2006/relationships">
+  <p:cSld>
+    <p:spTree>
+      <p:nvGrpSpPr>
+        <p:cNvPr id="1" name=""/>
+        <p:cNvGrpSpPr/>
+        <p:nvPr/>
+      </p:nvGrpSpPr>
+      <p:grpSpPr>
+        <a:xfrm>
+          <a:off x="0" y="0"/>
+          <a:ext cx="0" cy="0"/>
+          <a:chOff x="0" y="0"/>
+          <a:chExt cx="0" cy="0"/>
+        </a:xfrm>
+      </p:grpSpPr>
+      <p:sp>
+        <p:nvSpPr>
+          <p:cNvPr id="2" name="Slide Image Placeholder 1"/>
+          <p:cNvSpPr>
+            <a:spLocks noGrp="1"/>
+          </p:cNvSpPr>
+          <p:nvPr>
+            <p:ph type="sldImg" idx="2"/>
+          </p:nvPr>
+        </p:nvSpPr>
+        <p:spPr/>
+      </p:sp>
+      <p:sp>
+        <p:nvSpPr>
+          <p:cNvPr id="3" name="Notes Placeholder 2"/>
+          <p:cNvSpPr>
+            <a:spLocks noGrp="1"/>
+          </p:cNvSpPr>
+          <p:nvPr>
+            <p:ph type="body" idx="3" sz="quarter"/>
+          </p:nvPr>
+        </p:nvSpPr>
+        <p:spPr/>
+        <p:txBody>
+          <a:bodyPr/>
+          <a:lstStyle/>
+          <a:p>
+            <a:r>
+              <a:t>Walk the six tiles left-to-right, top row then bottom. Each tile = one objection removed.</a:t>
+            </a:r>
+          </a:p>
+        </p:txBody>
+      </p:sp>
+      <p:sp>
+        <p:nvSpPr>
+          <p:cNvPr id="4" name="Slide Number Placeholder 3"/>
+          <p:cNvSpPr>
+            <a:spLocks noGrp="1"/>
+          </p:cNvSpPr>
+          <p:nvPr>
+            <p:ph type="sldNum" idx="5" sz="quarter"/>
+          </p:nvPr>
+        </p:nvSpPr>
+        <p:spPr/>
+      </p:sp>
+    </p:spTree>
+  </p:cSld>
+  <p:clrMapOvr>
+    <a:masterClrMapping/>
+  </p:clrMapOvr>
+</p:notes>
+</file>
+
+<file path=ppt/notesSlides/notesSlide6.xml><?xml version="1.0" encoding="utf-8"?>
+<p:notes xmlns:a="http://schemas.openxmlformats.org/drawingml/2006/main" xmlns:p="http://schemas.openxmlformats.org/presentationml/2006/main" xmlns:r="http://schemas.openxmlformats.org/officeDocument/2006/relationships">
+  <p:cSld>
+    <p:spTree>
+      <p:nvGrpSpPr>
+        <p:cNvPr id="1" name=""/>
+        <p:cNvGrpSpPr/>
+        <p:nvPr/>
+      </p:nvGrpSpPr>
+      <p:grpSpPr>
+        <a:xfrm>
+          <a:off x="0" y="0"/>
+          <a:ext cx="0" cy="0"/>
+          <a:chOff x="0" y="0"/>
+          <a:chExt cx="0" cy="0"/>
+        </a:xfrm>
+      </p:grpSpPr>
+      <p:sp>
+        <p:nvSpPr>
+          <p:cNvPr id="2" name="Slide Image Placeholder 1"/>
+          <p:cNvSpPr>
+            <a:spLocks noGrp="1"/>
+          </p:cNvSpPr>
+          <p:nvPr>
+            <p:ph type="sldImg" idx="2"/>
+          </p:nvPr>
+        </p:nvSpPr>
+        <p:spPr/>
+      </p:sp>
+      <p:sp>
+        <p:nvSpPr>
+          <p:cNvPr id="3" name="Notes Placeholder 2"/>
+          <p:cNvSpPr>
+            <a:spLocks noGrp="1"/>
+          </p:cNvSpPr>
+          <p:nvPr>
+            <p:ph type="body" idx="3" sz="quarter"/>
+          </p:nvPr>
+        </p:nvSpPr>
+        <p:spPr/>
+        <p:txBody>
+          <a:bodyPr/>
+          <a:lstStyle/>
+          <a:p>
+            <a:r>
+              <a:t>Emphasize 60 days and zero tenant disruption — the two operational fears.</a:t>
+            </a:r>
+          </a:p>
+        </p:txBody>
+      </p:sp>
+      <p:sp>
+        <p:nvSpPr>
+          <p:cNvPr id="4" name="Slide Number Placeholder 3"/>
+          <p:cNvSpPr>
+            <a:spLocks noGrp="1"/>
+          </p:cNvSpPr>
+          <p:nvPr>
+            <p:ph type="sldNum" idx="5" sz="quarter"/>
+          </p:nvPr>
+        </p:nvSpPr>
+        <p:spPr/>
+      </p:sp>
+    </p:spTree>
+  </p:cSld>
+  <p:clrMapOvr>
+    <a:masterClrMapping/>
+  </p:clrMapOvr>
+</p:notes>
+</file>
+
+<file path=ppt/notesSlides/notesSlide7.xml><?xml version="1.0" encoding="utf-8"?>
+<p:notes xmlns:a="http://schemas.openxmlformats.org/drawingml/2006/main" xmlns:p="http://schemas.openxmlformats.org/presentationml/2006/main" xmlns:r="http://schemas.openxmlformats.org/officeDocument/2006/relationships">
+  <p:cSld>
+    <p:spTree>
+      <p:nvGrpSpPr>
+        <p:cNvPr id="1" name=""/>
+        <p:cNvGrpSpPr/>
+        <p:nvPr/>
+      </p:nvGrpSpPr>
+      <p:grpSpPr>
+        <a:xfrm>
+          <a:off x="0" y="0"/>
+          <a:ext cx="0" cy="0"/>
+          <a:chOff x="0" y="0"/>
+          <a:chExt cx="0" cy="0"/>
+        </a:xfrm>
+      </p:grpSpPr>
+      <p:sp>
+        <p:nvSpPr>
+          <p:cNvPr id="2" name="Slide Image Placeholder 1"/>
+          <p:cNvSpPr>
+            <a:spLocks noGrp="1"/>
+          </p:cNvSpPr>
+          <p:nvPr>
+            <p:ph type="sldImg" idx="2"/>
+          </p:nvPr>
+        </p:nvSpPr>
+        <p:spPr/>
+      </p:sp>
+      <p:sp>
+        <p:nvSpPr>
+          <p:cNvPr id="3" name="Notes Placeholder 2"/>
+          <p:cNvSpPr>
+            <a:spLocks noGrp="1"/>
+          </p:cNvSpPr>
+          <p:nvPr>
+            <p:ph type="body" idx="3" sz="quarter"/>
+          </p:nvPr>
+        </p:nvSpPr>
+        <p:spPr/>
+        <p:txBody>
+          <a:bodyPr/>
+          <a:lstStyle/>
+          <a:p>
+            <a:r>
+              <a:t>Bottom-up math lives in the appendix. Here: beachhead focus beats TAM theater.</a:t>
+            </a:r>
+          </a:p>
+        </p:txBody>
+      </p:sp>
+      <p:sp>
+        <p:nvSpPr>
+          <p:cNvPr id="4" name="Slide Number Placeholder 3"/>
+          <p:cNvSpPr>
+            <a:spLocks noGrp="1"/>
+          </p:cNvSpPr>
+          <p:nvPr>
+            <p:ph type="sldNum" idx="5" sz="quarter"/>
+          </p:nvPr>
+        </p:nvSpPr>
+        <p:spPr/>
+      </p:sp>
+    </p:spTree>
+  </p:cSld>
+  <p:clrMapOvr>
+    <a:masterClrMapping/>
+  </p:clrMapOvr>
+</p:notes>
+</file>
+
+<file path=ppt/notesSlides/notesSlide8.xml><?xml version="1.0" encoding="utf-8"?>
+<p:notes xmlns:a="http://schemas.openxmlformats.org/drawingml/2006/main" xmlns:p="http://schemas.openxmlformats.org/presentationml/2006/main" xmlns:r="http://schemas.openxmlformats.org/officeDocument/2006/relationships">
+  <p:cSld>
+    <p:spTree>
+      <p:nvGrpSpPr>
+        <p:cNvPr id="1" name=""/>
+        <p:cNvGrpSpPr/>
+        <p:nvPr/>
+      </p:nvGrpSpPr>
+      <p:grpSpPr>
+        <a:xfrm>
+          <a:off x="0" y="0"/>
+          <a:ext cx="0" cy="0"/>
+          <a:chOff x="0" y="0"/>
+          <a:chExt cx="0" cy="0"/>
+        </a:xfrm>
+      </p:grpSpPr>
+      <p:sp>
+        <p:nvSpPr>
+          <p:cNvPr id="2" name="Slide Image Placeholder 1"/>
+          <p:cNvSpPr>
+            <a:spLocks noGrp="1"/>
+          </p:cNvSpPr>
+          <p:nvPr>
+            <p:ph type="sldImg" idx="2"/>
+          </p:nvPr>
+        </p:nvSpPr>
+        <p:spPr/>
+      </p:sp>
+      <p:sp>
+        <p:nvSpPr>
+          <p:cNvPr id="3" name="Notes Placeholder 2"/>
+          <p:cNvSpPr>
+            <a:spLocks noGrp="1"/>
+          </p:cNvSpPr>
+          <p:nvPr>
+            <p:ph type="body" idx="3" sz="quarter"/>
+          </p:nvPr>
+        </p:nvSpPr>
+        <p:spPr/>
+        <p:txBody>
+          <a:bodyPr/>
+          <a:lstStyle/>
+          <a:p>
+            <a:r>
               <a:t>Strategic gray: only the current-year bar carries the accent color.</a:t>
+            </a:r>
+          </a:p>
+        </p:txBody>
+      </p:sp>
+      <p:sp>
+        <p:nvSpPr>
+          <p:cNvPr id="4" name="Slide Number Placeholder 3"/>
+          <p:cNvSpPr>
+            <a:spLocks noGrp="1"/>
+          </p:cNvSpPr>
+          <p:nvPr>
+            <p:ph type="sldNum" idx="5" sz="quarter"/>
+          </p:nvPr>
+        </p:nvSpPr>
+        <p:spPr/>
+      </p:sp>
+    </p:spTree>
+  </p:cSld>
+  <p:clrMapOvr>
+    <a:masterClrMapping/>
+  </p:clrMapOvr>
+</p:notes>
+</file>
+
+<file path=ppt/notesSlides/notesSlide9.xml><?xml version="1.0" encoding="utf-8"?>
+<p:notes xmlns:a="http://schemas.openxmlformats.org/drawingml/2006/main" xmlns:p="http://schemas.openxmlformats.org/presentationml/2006/main" xmlns:r="http://schemas.openxmlformats.org/officeDocument/2006/relationships">
+  <p:cSld>
+    <p:spTree>
+      <p:nvGrpSpPr>
+        <p:cNvPr id="1" name=""/>
+        <p:cNvGrpSpPr/>
+        <p:nvPr/>
+      </p:nvGrpSpPr>
+      <p:grpSpPr>
+        <a:xfrm>
+          <a:off x="0" y="0"/>
+          <a:ext cx="0" cy="0"/>
+          <a:chOff x="0" y="0"/>
+          <a:chExt cx="0" cy="0"/>
+        </a:xfrm>
+      </p:grpSpPr>
+      <p:sp>
+        <p:nvSpPr>
+          <p:cNvPr id="2" name="Slide Image Placeholder 1"/>
+          <p:cNvSpPr>
+            <a:spLocks noGrp="1"/>
+          </p:cNvSpPr>
+          <p:nvPr>
+            <p:ph type="sldImg" idx="2"/>
+          </p:nvPr>
+        </p:nvSpPr>
+        <p:spPr/>
+      </p:sp>
+      <p:sp>
+        <p:nvSpPr>
+          <p:cNvPr id="3" name="Notes Placeholder 2"/>
+          <p:cNvSpPr>
+            <a:spLocks noGrp="1"/>
+          </p:cNvSpPr>
+          <p:nvPr>
+            <p:ph type="body" idx="3" sz="quarter"/>
+          </p:nvPr>
+        </p:nvSpPr>
+        <p:spPr/>
+        <p:txBody>
+          <a:bodyPr/>
+          <a:lstStyle/>
+          <a:p>
+            <a:r>
+              <a:t>STAR moment. Let the number sit in silence for 3 seconds before speaking.</a:t>
             </a:r>
           </a:p>
         </p:txBody>
@@ -3962,7 +4662,7 @@
               </a:spcAft>
             </a:pPr>
             <a:r>
-              <a:rPr sz="1100" b="0">
+              <a:rPr sz="1250" b="0">
                 <a:solidFill>
                   <a:srgbClr val="A9CCC9"/>
                 </a:solidFill>
@@ -4004,7 +4704,7 @@
               </a:spcAft>
             </a:pPr>
             <a:r>
-              <a:rPr sz="1100" b="0">
+              <a:rPr sz="1250" b="0">
                 <a:solidFill>
                   <a:srgbClr val="A9CCC9"/>
                 </a:solidFill>
@@ -4375,7 +5075,7 @@
               </a:spcAft>
             </a:pPr>
             <a:r>
-              <a:rPr sz="1100" b="0">
+              <a:rPr sz="1250" b="0">
                 <a:solidFill>
                   <a:srgbClr val="A9CCC9"/>
                 </a:solidFill>
@@ -4417,7 +5117,7 @@
               </a:spcAft>
             </a:pPr>
             <a:r>
-              <a:rPr sz="1100" b="0">
+              <a:rPr sz="1250" b="0">
                 <a:solidFill>
                   <a:srgbClr val="A9CCC9"/>
                 </a:solidFill>
@@ -5375,7 +6075,7 @@
               </a:spcAft>
             </a:pPr>
             <a:r>
-              <a:rPr sz="1100" b="0">
+              <a:rPr sz="1250" b="0">
                 <a:solidFill>
                   <a:srgbClr val="A9CCC9"/>
                 </a:solidFill>
@@ -5417,7 +6117,7 @@
               </a:spcAft>
             </a:pPr>
             <a:r>
-              <a:rPr sz="1100" b="0">
+              <a:rPr sz="1250" b="0">
                 <a:solidFill>
                   <a:srgbClr val="A9CCC9"/>
                 </a:solidFill>
@@ -6438,7 +7138,7 @@
               </a:spcAft>
             </a:pPr>
             <a:r>
-              <a:rPr sz="1100" b="0">
+              <a:rPr sz="1250" b="0">
                 <a:solidFill>
                   <a:srgbClr val="A9CCC9"/>
                 </a:solidFill>
@@ -6480,7 +7180,7 @@
               </a:spcAft>
             </a:pPr>
             <a:r>
-              <a:rPr sz="1100" b="0">
+              <a:rPr sz="1250" b="0">
                 <a:solidFill>
                   <a:srgbClr val="A9CCC9"/>
                 </a:solidFill>
@@ -6853,7 +7553,7 @@
               </a:spcAft>
             </a:pPr>
             <a:r>
-              <a:rPr sz="1100" b="0">
+              <a:rPr sz="1250" b="0">
                 <a:solidFill>
                   <a:srgbClr val="A9CCC9"/>
                 </a:solidFill>
@@ -6895,7 +7595,7 @@
               </a:spcAft>
             </a:pPr>
             <a:r>
-              <a:rPr sz="1100" b="0">
+              <a:rPr sz="1250" b="0">
                 <a:solidFill>
                   <a:srgbClr val="A9CCC9"/>
                 </a:solidFill>
@@ -7702,7 +8402,7 @@
               </a:spcAft>
             </a:pPr>
             <a:r>
-              <a:rPr sz="1100" b="0">
+              <a:rPr sz="1250" b="0">
                 <a:solidFill>
                   <a:srgbClr val="A9CCC9"/>
                 </a:solidFill>
@@ -7744,7 +8444,7 @@
               </a:spcAft>
             </a:pPr>
             <a:r>
-              <a:rPr sz="1100" b="0">
+              <a:rPr sz="1250" b="0">
                 <a:solidFill>
                   <a:srgbClr val="A9CCC9"/>
                 </a:solidFill>
@@ -7945,7 +8645,7 @@
                 </a:solidFill>
                 <a:latin typeface="Inter"/>
               </a:rPr>
-              <a:t>Warehouses, malls and schools pay full grid tariffs under 3,000+ hours of annual sun.</a:t>
+              <a:t>Warehouses and malls pay full grid tariffs under 3,000+ hours of sun.</a:t>
             </a:r>
           </a:p>
         </p:txBody>
@@ -8098,7 +8798,7 @@
                 </a:solidFill>
                 <a:latin typeface="Inter"/>
               </a:rPr>
-              <a:t>Energy is now the second-largest operating cost for logistics and retail tenants.</a:t>
+              <a:t>Energy is now the #2 operating cost in logistics and retail.</a:t>
             </a:r>
           </a:p>
         </p:txBody>
@@ -8251,7 +8951,7 @@
                 </a:solidFill>
                 <a:latin typeface="Inter"/>
               </a:rPr>
-              <a:t>Owners like solar economics but refuse 7-figure upfront spend and maintenance risk.</a:t>
+              <a:t>Owners refuse 7-figure upfront spend and maintenance risk.</a:t>
             </a:r>
           </a:p>
         </p:txBody>
@@ -8381,7 +9081,7 @@
                 </a:solidFill>
                 <a:latin typeface="Inter"/>
               </a:rPr>
-              <a:t>Rise in commercial electricity tariffs across the region since 2021.</a:t>
+              <a:t>Rise in regional commercial tariffs since 2021.</a:t>
             </a:r>
           </a:p>
         </p:txBody>
@@ -8580,7 +9280,7 @@
               </a:spcAft>
             </a:pPr>
             <a:r>
-              <a:rPr sz="1100" b="0">
+              <a:rPr sz="1250" b="0">
                 <a:solidFill>
                   <a:srgbClr val="A9CCC9"/>
                 </a:solidFill>
@@ -8622,7 +9322,7 @@
               </a:spcAft>
             </a:pPr>
             <a:r>
-              <a:rPr sz="1100" b="0">
+              <a:rPr sz="1250" b="0">
                 <a:solidFill>
                   <a:srgbClr val="A9CCC9"/>
                 </a:solidFill>
@@ -8995,7 +9695,7 @@
               </a:spcAft>
             </a:pPr>
             <a:r>
-              <a:rPr sz="1100" b="0">
+              <a:rPr sz="1250" b="0">
                 <a:solidFill>
                   <a:srgbClr val="A9CCC9"/>
                 </a:solidFill>
@@ -9037,7 +9737,7 @@
               </a:spcAft>
             </a:pPr>
             <a:r>
-              <a:rPr sz="1100" b="0">
+              <a:rPr sz="1250" b="0">
                 <a:solidFill>
                   <a:srgbClr val="A9CCC9"/>
                 </a:solidFill>
@@ -9301,7 +10001,7 @@
                 </a:solidFill>
                 <a:latin typeface="Inter"/>
               </a:rPr>
-              <a:t>We fund 100% of hardware and installation against a 15-year power agreement.</a:t>
+              <a:t>We fund 100% against a 15-year power agreement.</a:t>
             </a:r>
           </a:p>
         </p:txBody>
@@ -9517,7 +10217,7 @@
                 </a:solidFill>
                 <a:latin typeface="Inter"/>
               </a:rPr>
-              <a:t>Owners pay per kWh at a fixed discount to the grid tariff from day one.</a:t>
+              <a:t>Per-kWh pricing at a fixed discount from day one.</a:t>
             </a:r>
           </a:p>
         </p:txBody>
@@ -9733,7 +10433,7 @@
                 </a:solidFill>
                 <a:latin typeface="Inter"/>
               </a:rPr>
-              <a:t>Monitoring, cleaning and maintenance included — performance is guaranteed.</a:t>
+              <a:t>Monitoring, cleaning, maintenance — performance guaranteed.</a:t>
             </a:r>
           </a:p>
         </p:txBody>
@@ -9949,7 +10649,7 @@
                 </a:solidFill>
                 <a:latin typeface="Inter"/>
               </a:rPr>
-              <a:t>Real-time generation, savings and CO₂ reporting for ESG disclosures.</a:t>
+              <a:t>Generation, savings and CO2 reporting for ESG.</a:t>
             </a:r>
           </a:p>
         </p:txBody>
@@ -10165,7 +10865,7 @@
                 </a:solidFill>
                 <a:latin typeface="Inter"/>
               </a:rPr>
-              <a:t>We aggregate and sell credits, sharing 30% of proceeds with owners.</a:t>
+              <a:t>Credits aggregated; 30% of proceeds shared with owners.</a:t>
             </a:r>
           </a:p>
         </p:txBody>
@@ -10381,7 +11081,7 @@
                 </a:solidFill>
                 <a:latin typeface="Inter"/>
               </a:rPr>
-              <a:t>Standardized PPAs already cleared by two regional lenders.</a:t>
+              <a:t>Standard PPAs cleared by two regional lenders.</a:t>
             </a:r>
           </a:p>
         </p:txBody>
@@ -10622,7 +11322,7 @@
               </a:spcAft>
             </a:pPr>
             <a:r>
-              <a:rPr sz="1100" b="0">
+              <a:rPr sz="1250" b="0">
                 <a:solidFill>
                   <a:srgbClr val="A9CCC9"/>
                 </a:solidFill>
@@ -10664,7 +11364,7 @@
               </a:spcAft>
             </a:pPr>
             <a:r>
-              <a:rPr sz="1100" b="0">
+              <a:rPr sz="1250" b="0">
                 <a:solidFill>
                   <a:srgbClr val="A9CCC9"/>
                 </a:solidFill>
@@ -11877,7 +12577,7 @@
               </a:spcAft>
             </a:pPr>
             <a:r>
-              <a:rPr sz="1100" b="0">
+              <a:rPr sz="1250" b="0">
                 <a:solidFill>
                   <a:srgbClr val="A9CCC9"/>
                 </a:solidFill>
@@ -11919,7 +12619,7 @@
               </a:spcAft>
             </a:pPr>
             <a:r>
-              <a:rPr sz="1100" b="0">
+              <a:rPr sz="1250" b="0">
                 <a:solidFill>
                   <a:srgbClr val="A9CCC9"/>
                 </a:solidFill>
@@ -12550,7 +13250,7 @@
               </a:spcAft>
             </a:pPr>
             <a:r>
-              <a:rPr sz="1100" b="0">
+              <a:rPr sz="1250" b="0">
                 <a:solidFill>
                   <a:srgbClr val="A9CCC9"/>
                 </a:solidFill>
@@ -12592,7 +13292,7 @@
               </a:spcAft>
             </a:pPr>
             <a:r>
-              <a:rPr sz="1100" b="0">
+              <a:rPr sz="1250" b="0">
                 <a:solidFill>
                   <a:srgbClr val="A9CCC9"/>
                 </a:solidFill>
@@ -12987,7 +13687,7 @@
               </a:spcAft>
             </a:pPr>
             <a:r>
-              <a:rPr sz="1100" b="0">
+              <a:rPr sz="1250" b="0">
                 <a:solidFill>
                   <a:srgbClr val="A9CCC9"/>
                 </a:solidFill>
@@ -13029,7 +13729,7 @@
               </a:spcAft>
             </a:pPr>
             <a:r>
-              <a:rPr sz="1100" b="0">
+              <a:rPr sz="1250" b="0">
                 <a:solidFill>
                   <a:srgbClr val="A9CCC9"/>
                 </a:solidFill>
